--- a/content/W04/D1/slides/C2_W04_D01_fallback_STUDENT.pptx
+++ b/content/W04/D1/slides/C2_W04_D01_fallback_STUDENT.pptx
@@ -7077,7 +7077,7 @@
         </p:nvGraphicFramePr>
         <p:xfrm>
           <a:off x="530352" y="1682496"/>
-          <a:ext cx="11130990" cy="3299968"/>
+          <a:ext cx="11130990" cy="3334512"/>
         </p:xfrm>
         <a:graphic>
           <a:graphicData uri="http://schemas.openxmlformats.org/drawingml/2006/table">
@@ -7090,14 +7090,14 @@
                 <a:gridCol w="3100697"/>
                 <a:gridCol w="5791298"/>
               </a:tblGrid>
-              <a:tr h="369824">
+              <a:tr h="352552">
                 <a:tc>
                   <a:txBody>
                     <a:bodyPr/>
                     <a:lstStyle/>
                     <a:p>
                       <a:r>
-                        <a:rPr sz="1450" b="1" i="0">
+                        <a:rPr sz="1350" b="1" i="0">
                           <a:solidFill>
                             <a:srgbClr val="FFFFFF"/>
                           </a:solidFill>
@@ -7119,7 +7119,7 @@
                     <a:lstStyle/>
                     <a:p>
                       <a:r>
-                        <a:rPr sz="1450" b="1" i="0">
+                        <a:rPr sz="1350" b="1" i="0">
                           <a:solidFill>
                             <a:srgbClr val="FFFFFF"/>
                           </a:solidFill>
@@ -7141,7 +7141,7 @@
                     <a:lstStyle/>
                     <a:p>
                       <a:r>
-                        <a:rPr sz="1450" b="1" i="0">
+                        <a:rPr sz="1350" b="1" i="0">
                           <a:solidFill>
                             <a:srgbClr val="FFFFFF"/>
                           </a:solidFill>
@@ -7158,14 +7158,14 @@
                   </a:tcPr>
                 </a:tc>
               </a:tr>
-              <a:tr h="853440">
+              <a:tr h="801624">
                 <a:tc>
                   <a:txBody>
                     <a:bodyPr/>
                     <a:lstStyle/>
                     <a:p>
                       <a:r>
-                        <a:rPr sz="1400" b="0" i="0">
+                        <a:rPr sz="1300" b="0" i="0">
                           <a:solidFill>
                             <a:srgbClr val="1A1440"/>
                           </a:solidFill>
@@ -7187,7 +7187,7 @@
                     <a:lstStyle/>
                     <a:p>
                       <a:r>
-                        <a:rPr sz="1400" b="0" i="0">
+                        <a:rPr sz="1300" b="0" i="0">
                           <a:solidFill>
                             <a:srgbClr val="1A1440"/>
                           </a:solidFill>
@@ -7209,7 +7209,7 @@
                     <a:lstStyle/>
                     <a:p>
                       <a:r>
-                        <a:rPr sz="1400" b="0" i="0">
+                        <a:rPr sz="1300" b="0" i="0">
                           <a:solidFill>
                             <a:srgbClr val="1A1440"/>
                           </a:solidFill>
@@ -7226,14 +7226,14 @@
                   </a:tcPr>
                 </a:tc>
               </a:tr>
-              <a:tr h="611632">
+              <a:tr h="577088">
                 <a:tc>
                   <a:txBody>
                     <a:bodyPr/>
                     <a:lstStyle/>
                     <a:p>
                       <a:r>
-                        <a:rPr sz="1400" b="0" i="0">
+                        <a:rPr sz="1300" b="0" i="0">
                           <a:solidFill>
                             <a:srgbClr val="1A1440"/>
                           </a:solidFill>
@@ -7255,7 +7255,7 @@
                     <a:lstStyle/>
                     <a:p>
                       <a:r>
-                        <a:rPr sz="1400" b="0" i="0">
+                        <a:rPr sz="1300" b="0" i="0">
                           <a:solidFill>
                             <a:srgbClr val="1A1440"/>
                           </a:solidFill>
@@ -7277,7 +7277,7 @@
                     <a:lstStyle/>
                     <a:p>
                       <a:r>
-                        <a:rPr sz="1400" b="0" i="0">
+                        <a:rPr sz="1300" b="0" i="0">
                           <a:solidFill>
                             <a:srgbClr val="1A1440"/>
                           </a:solidFill>
@@ -7294,14 +7294,14 @@
                   </a:tcPr>
                 </a:tc>
               </a:tr>
-              <a:tr h="611632">
+              <a:tr h="577088">
                 <a:tc>
                   <a:txBody>
                     <a:bodyPr/>
                     <a:lstStyle/>
                     <a:p>
                       <a:r>
-                        <a:rPr sz="1400" b="0" i="0">
+                        <a:rPr sz="1300" b="0" i="0">
                           <a:solidFill>
                             <a:srgbClr val="1A1440"/>
                           </a:solidFill>
@@ -7323,7 +7323,7 @@
                     <a:lstStyle/>
                     <a:p>
                       <a:r>
-                        <a:rPr sz="1400" b="0" i="0">
+                        <a:rPr sz="1300" b="0" i="0">
                           <a:solidFill>
                             <a:srgbClr val="1A1440"/>
                           </a:solidFill>
@@ -7345,7 +7345,7 @@
                     <a:lstStyle/>
                     <a:p>
                       <a:r>
-                        <a:rPr sz="1400" b="0" i="0">
+                        <a:rPr sz="1300" b="0" i="0">
                           <a:solidFill>
                             <a:srgbClr val="1A1440"/>
                           </a:solidFill>
@@ -7362,14 +7362,14 @@
                   </a:tcPr>
                 </a:tc>
               </a:tr>
-              <a:tr h="853440">
+              <a:tr h="1026160">
                 <a:tc>
                   <a:txBody>
                     <a:bodyPr/>
                     <a:lstStyle/>
                     <a:p>
                       <a:r>
-                        <a:rPr sz="1400" b="0" i="0">
+                        <a:rPr sz="1300" b="0" i="0">
                           <a:solidFill>
                             <a:srgbClr val="1A1440"/>
                           </a:solidFill>
@@ -7391,7 +7391,7 @@
                     <a:lstStyle/>
                     <a:p>
                       <a:r>
-                        <a:rPr sz="1400" b="0" i="0">
+                        <a:rPr sz="1300" b="0" i="0">
                           <a:solidFill>
                             <a:srgbClr val="1A1440"/>
                           </a:solidFill>
@@ -7413,13 +7413,13 @@
                     <a:lstStyle/>
                     <a:p>
                       <a:r>
-                        <a:rPr sz="1400" b="0" i="0">
+                        <a:rPr sz="1300" b="0" i="0">
                           <a:solidFill>
                             <a:srgbClr val="1A1440"/>
                           </a:solidFill>
                           <a:latin typeface="Calibri"/>
                         </a:rPr>
-                        <a:t>"The redesign on completed peak trips with acceptance guardrails would have cost Rs 74 lakh over six weeks against the Rs 1.9 crore spent"</a:t>
+                        <a:t>"Paid only where acceptance stayed at 0.5 or above, the six weeks would have cost Rs 74 lakh against the Rs 1.9 crore spent, if every driver behaved the same; the test tells us how many would not"</a:t>
                       </a:r>
                     </a:p>
                   </a:txBody>
@@ -7442,7 +7442,7 @@
         </p:nvSpPr>
         <p:spPr>
           <a:xfrm>
-            <a:off x="530352" y="5238496"/>
+            <a:off x="530352" y="5273040"/>
             <a:ext cx="11130991" cy="807720"/>
           </a:xfrm>
           <a:prstGeom prst="roundRect">
@@ -7490,7 +7490,7 @@
         </p:nvSpPr>
         <p:spPr>
           <a:xfrm>
-            <a:off x="676656" y="5366512"/>
+            <a:off x="676656" y="5401056"/>
             <a:ext cx="45720" cy="551688"/>
           </a:xfrm>
           <a:prstGeom prst="roundRect">
@@ -7536,7 +7536,7 @@
         </p:nvSpPr>
         <p:spPr>
           <a:xfrm>
-            <a:off x="877824" y="5357368"/>
+            <a:off x="877824" y="5391912"/>
             <a:ext cx="10564063" cy="624840"/>
           </a:xfrm>
           <a:prstGeom prst="rect">
@@ -11553,7 +11553,7 @@
       </p:sp>
       <p:pic>
         <p:nvPicPr>
-          <p:cNvPr id="9" name="mermaid diagram" descr="88cffa8870dc8670.png"/>
+          <p:cNvPr id="9" name="mermaid diagram" descr="6d4ab83d28cb1c12.png"/>
           <p:cNvPicPr>
             <a:picLocks noChangeAspect="1"/>
           </p:cNvPicPr>
@@ -11567,8 +11567,8 @@
         </p:blipFill>
         <p:spPr>
           <a:xfrm>
-            <a:off x="1316628" y="1682496"/>
-            <a:ext cx="3213772" cy="4517136"/>
+            <a:off x="530352" y="2169654"/>
+            <a:ext cx="4786326" cy="3542819"/>
           </a:xfrm>
           <a:prstGeom prst="rect">
             <a:avLst/>
@@ -14637,7 +14637,7 @@
         </p:nvGraphicFramePr>
         <p:xfrm>
           <a:off x="530352" y="1956816"/>
-          <a:ext cx="11130990" cy="2170176"/>
+          <a:ext cx="11130990" cy="2377440"/>
         </p:xfrm>
         <a:graphic>
           <a:graphicData uri="http://schemas.openxmlformats.org/drawingml/2006/table">
@@ -14921,7 +14921,7 @@
                   </a:tcPr>
                 </a:tc>
               </a:tr>
-              <a:tr h="749808">
+              <a:tr h="957072">
                 <a:tc>
                   <a:txBody>
                     <a:bodyPr/>
@@ -14956,7 +14956,7 @@
                           </a:solidFill>
                           <a:latin typeface="Calibri"/>
                         </a:rPr>
-                        <a:t>"Our budget was Rs 1 crore and we spent Rs 1.9; your redesign has to prove the saving"</a:t>
+                        <a:t>"The top-up cost Rs 1.9 crore in six weeks; your redesign has to prove what it saves"</a:t>
                       </a:r>
                     </a:p>
                   </a:txBody>
@@ -14978,7 +14978,7 @@
                           </a:solidFill>
                           <a:latin typeface="Calibri"/>
                         </a:rPr>
-                        <a:t>True: the budget overran</a:t>
+                        <a:t>True: the top-up budget is finance's number</a:t>
                       </a:r>
                     </a:p>
                   </a:txBody>
@@ -15000,7 +15000,7 @@
                           </a:solidFill>
                           <a:latin typeface="Calibri"/>
                         </a:rPr>
-                        <a:t>The redesign would have cost Rs 74 lakh for the same six weeks, with the acceptance guardrail named</a:t>
+                        <a:t>Paid only to driver-weeks at or above 0.5 acceptance, the same six weeks would have cost Rs 74 lakh if every driver behaved the same; the A/B test says how many would change</a:t>
                       </a:r>
                     </a:p>
                   </a:txBody>
@@ -15023,7 +15023,7 @@
         </p:nvSpPr>
         <p:spPr>
           <a:xfrm>
-            <a:off x="530352" y="4383024"/>
+            <a:off x="530352" y="4590288"/>
             <a:ext cx="11130991" cy="772160"/>
           </a:xfrm>
           <a:prstGeom prst="rect">
@@ -16223,7 +16223,7 @@
       </p:sp>
       <p:pic>
         <p:nvPicPr>
-          <p:cNvPr id="9" name="mermaid diagram" descr="bb007a8db7400d13.png"/>
+          <p:cNvPr id="9" name="mermaid diagram" descr="45bff693cab4139a.png"/>
           <p:cNvPicPr>
             <a:picLocks noChangeAspect="1"/>
           </p:cNvPicPr>
@@ -16237,8 +16237,8 @@
         </p:blipFill>
         <p:spPr>
           <a:xfrm>
-            <a:off x="530352" y="3377456"/>
-            <a:ext cx="4786326" cy="1127214"/>
+            <a:off x="530352" y="3585423"/>
+            <a:ext cx="4786326" cy="711280"/>
           </a:xfrm>
           <a:prstGeom prst="rect">
             <a:avLst/>

--- a/content/W04/D1/slides/C2_W04_D01_fallback_STUDENT.pptx
+++ b/content/W04/D1/slides/C2_W04_D01_fallback_STUDENT.pptx
@@ -7044,7 +7044,7 @@
                 </a:solidFill>
                 <a:latin typeface="Calibri"/>
               </a:rPr>
-              <a:t>How does a candidate get three teams who each want their own target to one number, and what do they say to the two who lose?</a:t>
+              <a:t>How does a candidate get three teams who each want their own target to one number, and what do they say to the teams who lose?</a:t>
             </a:r>
           </a:p>
         </p:txBody>
@@ -7590,7 +7590,7 @@
         </p:nvGraphicFramePr>
         <p:xfrm>
           <a:off x="530352" y="1956816"/>
-          <a:ext cx="11130989" cy="2816352"/>
+          <a:ext cx="11130989" cy="3058160"/>
         </p:xfrm>
         <a:graphic>
           <a:graphicData uri="http://schemas.openxmlformats.org/drawingml/2006/table">
@@ -7807,7 +7807,7 @@
                   </a:tcPr>
                 </a:tc>
               </a:tr>
-              <a:tr h="611632">
+              <a:tr h="853440">
                 <a:tc>
                   <a:txBody>
                     <a:bodyPr/>
@@ -7820,7 +7820,7 @@
                           </a:solidFill>
                           <a:latin typeface="Calibri"/>
                         </a:rPr>
-                        <a:t>The two who lose</a:t>
+                        <a:t>The teams who lose</a:t>
                       </a:r>
                     </a:p>
                   </a:txBody>
@@ -7864,7 +7864,7 @@
                           </a:solidFill>
                           <a:latin typeface="Calibri"/>
                         </a:rPr>
-                        <a:t>Shows where their number now lives: hours as an input beside trips per hour, top-up per trip as a guardrail</a:t>
+                        <a:t>Says none of the three numbers is the target, then places each: hours beside trips per online hour; the enrolled count beside the rate; a total cap and cost per extra trip for finance</a:t>
                       </a:r>
                     </a:p>
                   </a:txBody>
@@ -7932,7 +7932,7 @@
                           </a:solidFill>
                           <a:latin typeface="Calibri"/>
                         </a:rPr>
-                        <a:t>"If waits rose while the north star held, I would revisit the floor"</a:t>
+                        <a:t>"If the wait by zone rose under the new rule, I would revisit the acceptance floor"</a:t>
                       </a:r>
                     </a:p>
                   </a:txBody>
@@ -9301,7 +9301,7 @@
         <p:spPr>
           <a:xfrm>
             <a:off x="530352" y="1956816"/>
-            <a:ext cx="2079894" cy="2534412"/>
+            <a:ext cx="2079894" cy="2724404"/>
           </a:xfrm>
           <a:prstGeom prst="roundRect">
             <a:avLst>
@@ -9528,7 +9528,7 @@
         <p:spPr>
           <a:xfrm>
             <a:off x="2793126" y="1956816"/>
-            <a:ext cx="2079894" cy="2534412"/>
+            <a:ext cx="2079894" cy="2724404"/>
           </a:xfrm>
           <a:prstGeom prst="roundRect">
             <a:avLst>
@@ -9720,7 +9720,7 @@
         <p:spPr>
           <a:xfrm>
             <a:off x="2994294" y="3303524"/>
-            <a:ext cx="1677558" cy="763016"/>
+            <a:ext cx="1677558" cy="944626"/>
           </a:xfrm>
           <a:prstGeom prst="rect">
             <a:avLst/>
@@ -9741,7 +9741,7 @@
                 </a:solidFill>
                 <a:latin typeface="Calibri"/>
               </a:rPr>
-              <a:t>A debit card, the largest product, could sit unused in the count for up to four years</a:t>
+              <a:t>A debit card, the largest product category, could stay in the count for up to four years with no use</a:t>
             </a:r>
           </a:p>
         </p:txBody>
@@ -9755,7 +9755,7 @@
         <p:spPr>
           <a:xfrm>
             <a:off x="5055900" y="1956816"/>
-            <a:ext cx="2079894" cy="2534412"/>
+            <a:ext cx="2079894" cy="2724404"/>
           </a:xfrm>
           <a:prstGeom prst="roundRect">
             <a:avLst>
@@ -9947,7 +9947,7 @@
         <p:spPr>
           <a:xfrm>
             <a:off x="5257068" y="3303524"/>
-            <a:ext cx="1677558" cy="944626"/>
+            <a:ext cx="1677558" cy="1126236"/>
           </a:xfrm>
           <a:prstGeom prst="rect">
             <a:avLst/>
@@ -9968,7 +9968,7 @@
                 </a:solidFill>
                 <a:latin typeface="Calibri"/>
               </a:rPr>
-              <a:t>In 2013 remittance accounts were added without telling investors; 0.04 of that year's 0.11 rise</a:t>
+              <a:t>In 2013 remittance accounts joined the count without investors being told, giving 0.04 of that year's 0.11 rise in the ratio</a:t>
             </a:r>
           </a:p>
         </p:txBody>
@@ -9982,7 +9982,7 @@
         <p:spPr>
           <a:xfrm>
             <a:off x="7318674" y="1956816"/>
-            <a:ext cx="2079894" cy="2534412"/>
+            <a:ext cx="2079894" cy="2724404"/>
           </a:xfrm>
           <a:prstGeom prst="roundRect">
             <a:avLst>
@@ -10174,7 +10174,7 @@
         <p:spPr>
           <a:xfrm>
             <a:off x="7519842" y="3303524"/>
-            <a:ext cx="1677558" cy="763016"/>
+            <a:ext cx="1677558" cy="944626"/>
           </a:xfrm>
           <a:prstGeom prst="rect">
             <a:avLst/>
@@ -10195,7 +10195,7 @@
                 </a:solidFill>
                 <a:latin typeface="Calibri"/>
               </a:rPr>
-              <a:t>Staff moved customers' money into new accounts to meet the funding rule for sales credit</a:t>
+              <a:t>Staff moved customers' money into new accounts so the accounts counted as funded and earned sales credit</a:t>
             </a:r>
           </a:p>
         </p:txBody>
@@ -10209,7 +10209,7 @@
         <p:spPr>
           <a:xfrm>
             <a:off x="9581448" y="1956816"/>
-            <a:ext cx="2079894" cy="2534412"/>
+            <a:ext cx="2079894" cy="2724404"/>
           </a:xfrm>
           <a:prstGeom prst="roundRect">
             <a:avLst>
@@ -10435,7 +10435,7 @@
         </p:nvSpPr>
         <p:spPr>
           <a:xfrm>
-            <a:off x="530352" y="4674108"/>
+            <a:off x="530352" y="4864100"/>
             <a:ext cx="11130991" cy="495807"/>
           </a:xfrm>
           <a:prstGeom prst="rect">
@@ -11384,7 +11384,7 @@
                 </a:solidFill>
                 <a:latin typeface="Calibri"/>
               </a:rPr>
-              <a:t>a) Numerator: count only accounts the customer used</a:t>
+              <a:t>a) Numerator: count an account only if the customer used it</a:t>
             </a:r>
           </a:p>
           <a:p>
@@ -11416,7 +11416,7 @@
                 </a:solidFill>
                 <a:latin typeface="Calibri"/>
               </a:rPr>
-              <a:t>c) Window: an account counts only if used inside the period</a:t>
+              <a:t>c) Window: drop an account once it goes unused for the period</a:t>
             </a:r>
           </a:p>
           <a:p>
@@ -13726,7 +13726,7 @@
         <p:spPr>
           <a:xfrm>
             <a:off x="530352" y="1956816"/>
-            <a:ext cx="3588410" cy="1964436"/>
+            <a:ext cx="3588410" cy="2154428"/>
           </a:xfrm>
           <a:prstGeom prst="roundRect">
             <a:avLst>
@@ -13953,7 +13953,7 @@
         <p:spPr>
           <a:xfrm>
             <a:off x="4301642" y="1956816"/>
-            <a:ext cx="3588410" cy="1964436"/>
+            <a:ext cx="3588410" cy="2154428"/>
           </a:xfrm>
           <a:prstGeom prst="roundRect">
             <a:avLst>
@@ -14044,7 +14044,7 @@
       </p:sp>
       <p:pic>
         <p:nvPicPr>
-          <p:cNvPr id="17" name="Picture 16" descr="map-pin_d669bc82d623.png"/>
+          <p:cNvPr id="17" name="Picture 16" descr="wallet_3a2d2f5ade12.png"/>
           <p:cNvPicPr>
             <a:picLocks noChangeAspect="1"/>
           </p:cNvPicPr>
@@ -14096,7 +14096,7 @@
                 </a:solidFill>
                 <a:latin typeface="Calibri"/>
               </a:rPr>
-              <a:t>CITY HEAD</a:t>
+              <a:t>FINANCE PARTNER</a:t>
             </a:r>
           </a:p>
         </p:txBody>
@@ -14145,7 +14145,7 @@
         <p:spPr>
           <a:xfrm>
             <a:off x="4502810" y="3303524"/>
-            <a:ext cx="3186074" cy="399796"/>
+            <a:ext cx="3186074" cy="581406"/>
           </a:xfrm>
           <a:prstGeom prst="rect">
             <a:avLst/>
@@ -14166,7 +14166,7 @@
                 </a:solidFill>
                 <a:latin typeface="Calibri"/>
               </a:rPr>
-              <a:t>Rewards trips, including the short ones a driver cherry-picks</a:t>
+              <a:t>Rewards trips, including the short ones a driver cherry-picks; finance wants each rupee to buy a trip</a:t>
             </a:r>
           </a:p>
         </p:txBody>
@@ -14180,7 +14180,7 @@
         <p:spPr>
           <a:xfrm>
             <a:off x="8072932" y="1956816"/>
-            <a:ext cx="3588410" cy="1964436"/>
+            <a:ext cx="3588410" cy="2154428"/>
           </a:xfrm>
           <a:prstGeom prst="roundRect">
             <a:avLst>
@@ -14271,7 +14271,7 @@
       </p:sp>
       <p:pic>
         <p:nvPicPr>
-          <p:cNvPr id="23" name="Picture 22" descr="wallet_3a2d2f5ade12.png"/>
+          <p:cNvPr id="23" name="Picture 22" descr="megaphone_df6318bcf2f9.png"/>
           <p:cNvPicPr>
             <a:picLocks noChangeAspect="1"/>
           </p:cNvPicPr>
@@ -14323,7 +14323,7 @@
                 </a:solidFill>
                 <a:latin typeface="Calibri"/>
               </a:rPr>
-              <a:t>FINANCE PARTNER</a:t>
+              <a:t>MARKETING LEAD</a:t>
             </a:r>
           </a:p>
         </p:txBody>
@@ -14358,7 +14358,7 @@
                 </a:solidFill>
                 <a:latin typeface="Calibri"/>
               </a:rPr>
-              <a:t>Acceptance share</a:t>
+              <a:t>Share of offers accepted</a:t>
             </a:r>
           </a:p>
         </p:txBody>
@@ -14372,7 +14372,7 @@
         <p:spPr>
           <a:xfrm>
             <a:off x="8274100" y="3303524"/>
-            <a:ext cx="3186074" cy="399796"/>
+            <a:ext cx="3186074" cy="581406"/>
           </a:xfrm>
           <a:prstGeom prst="rect">
             <a:avLst/>
@@ -14393,7 +14393,7 @@
                 </a:solidFill>
                 <a:latin typeface="Calibri"/>
               </a:rPr>
-              <a:t>Rewards saying yes, including to trips later cancelled</a:t>
+              <a:t>Rewards saying yes, including to trips later cancelled; the number marketing can show riders</a:t>
             </a:r>
           </a:p>
         </p:txBody>
@@ -14406,7 +14406,7 @@
         </p:nvSpPr>
         <p:spPr>
           <a:xfrm>
-            <a:off x="530352" y="4104132"/>
+            <a:off x="530352" y="4294124"/>
             <a:ext cx="11130991" cy="772160"/>
           </a:xfrm>
           <a:prstGeom prst="rect">
@@ -15039,7 +15039,7 @@
         </p:nvGraphicFramePr>
         <p:xfrm>
           <a:off x="530352" y="1956816"/>
-          <a:ext cx="11130989" cy="1962912"/>
+          <a:ext cx="11130990" cy="1962912"/>
         </p:xfrm>
         <a:graphic>
           <a:graphicData uri="http://schemas.openxmlformats.org/drawingml/2006/table">
@@ -15048,10 +15048,10 @@
                 <a:tableStyleId>{2D5ABB26-0587-4C30-8999-92F81FD0307C}</a:tableStyleId>
               </a:tblPr>
               <a:tblGrid>
-                <a:gridCol w="1250210"/>
-                <a:gridCol w="3398922"/>
-                <a:gridCol w="2324566"/>
-                <a:gridCol w="4157291"/>
+                <a:gridCol w="1217140"/>
+                <a:gridCol w="3309015"/>
+                <a:gridCol w="2263078"/>
+                <a:gridCol w="4341757"/>
               </a:tblGrid>
               <a:tr h="335280">
                 <a:tc>
@@ -15246,7 +15246,7 @@
                           </a:solidFill>
                           <a:latin typeface="Calibri"/>
                         </a:rPr>
-                        <a:t>City head</a:t>
+                        <a:t>Finance partner</a:t>
                       </a:r>
                     </a:p>
                   </a:txBody>
@@ -15268,7 +15268,7 @@
                           </a:solidFill>
                           <a:latin typeface="Calibri"/>
                         </a:rPr>
-                        <a:t>"Trips are the outcome; why guard them?"</a:t>
+                        <a:t>"Trips are what the money buys; why guard them?"</a:t>
                       </a:r>
                     </a:p>
                   </a:txBody>
@@ -15336,7 +15336,7 @@
                           </a:solidFill>
                           <a:latin typeface="Calibri"/>
                         </a:rPr>
-                        <a:t>Finance partner</a:t>
+                        <a:t>Marketing lead</a:t>
                       </a:r>
                     </a:p>
                   </a:txBody>
@@ -15358,7 +15358,7 @@
                           </a:solidFill>
                           <a:latin typeface="Calibri"/>
                         </a:rPr>
-                        <a:t>"Acceptance is the cheapest number to check"</a:t>
+                        <a:t>"Acceptance is what riders feel first"</a:t>
                       </a:r>
                     </a:p>
                   </a:txBody>
@@ -15402,7 +15402,7 @@
                           </a:solidFill>
                           <a:latin typeface="Calibri"/>
                         </a:rPr>
-                        <a:t>Gaming note: an accepted trip then cancelled; cancels beside it</a:t>
+                        <a:t>Gaming note: an accepted trip then cancelled; the cancel share beside it</a:t>
                       </a:r>
                     </a:p>
                   </a:txBody>

--- a/content/W04/D1/slides/C2_W04_D01_fallback_STUDENT.pptx
+++ b/content/W04/D1/slides/C2_W04_D01_fallback_STUDENT.pptx
@@ -1170,7 +1170,7 @@
           </a:p>
           <a:p>
             <a:r>
-              <a:t>and VA's desired date from the morning), a definition change in Uber's own count (none in the case;</a:t>
+              <a:t>and VA's desired date from chapter 5), a definition change in Uber's own count (none in the case;</a:t>
             </a:r>
           </a:p>
           <a:p>
@@ -4764,7 +4764,7 @@
                 </a:solidFill>
                 <a:latin typeface="Georgia"/>
               </a:rPr>
-              <a:t>06</a:t>
+              <a:t>13</a:t>
             </a:r>
           </a:p>
         </p:txBody>
@@ -5295,7 +5295,7 @@
                 </a:solidFill>
                 <a:latin typeface="Calibri"/>
               </a:rPr>
-              <a:t>WEEK 4  ·  DAY 1  ·  THE METRIC CLINIC, IF THE TENTATIVE FACULTY BLOCK SLIPS</a:t>
+              <a:t>WEEK 4  ·  MONDAY  ·  THE METRIC CLINIC, IF THE TENTATIVE FACULTY BLOCK SLIPS</a:t>
             </a:r>
           </a:p>
         </p:txBody>
@@ -6048,7 +6048,7 @@
                 </a:solidFill>
                 <a:latin typeface="Calibri"/>
               </a:rPr>
-              <a:t>WEEK 4  ·  DAY 1  ·  THE METRIC CLINIC, IF THE TENTATIVE FACULTY BLOCK SLIPS</a:t>
+              <a:t>WEEK 4  ·  MONDAY  ·  THE METRIC CLINIC, IF THE TENTATIVE FACULTY BLOCK SLIPS</a:t>
             </a:r>
           </a:p>
         </p:txBody>
@@ -6974,7 +6974,7 @@
                 </a:solidFill>
                 <a:latin typeface="Georgia"/>
               </a:rPr>
-              <a:t>09</a:t>
+              <a:t>16</a:t>
             </a:r>
           </a:p>
         </p:txBody>
@@ -7505,7 +7505,7 @@
                 </a:solidFill>
                 <a:latin typeface="Calibri"/>
               </a:rPr>
-              <a:t>WEEK 4  ·  DAY 1  ·  THE METRIC CLINIC, IF THE TENTATIVE FACULTY BLOCK SLIPS</a:t>
+              <a:t>WEEK 4  ·  MONDAY  ·  THE METRIC CLINIC, IF THE TENTATIVE FACULTY BLOCK SLIPS</a:t>
             </a:r>
           </a:p>
         </p:txBody>
@@ -8464,7 +8464,7 @@
                 </a:solidFill>
                 <a:latin typeface="Calibri"/>
               </a:rPr>
-              <a:t>WEEK 4  ·  DAY 1  ·  THE METRIC CLINIC, IF THE TENTATIVE FACULTY BLOCK SLIPS</a:t>
+              <a:t>WEEK 4  ·  MONDAY  ·  THE METRIC CLINIC, IF THE TENTATIVE FACULTY BLOCK SLIPS</a:t>
             </a:r>
           </a:p>
         </p:txBody>
@@ -9217,7 +9217,7 @@
                 </a:solidFill>
                 <a:latin typeface="Calibri"/>
               </a:rPr>
-              <a:t>WEEK 4  ·  DAY 1  ·  THE METRIC CLINIC, IF THE TENTATIVE FACULTY BLOCK SLIPS</a:t>
+              <a:t>WEEK 4  ·  MONDAY  ·  THE METRIC CLINIC, IF THE TENTATIVE FACULTY BLOCK SLIPS</a:t>
             </a:r>
           </a:p>
         </p:txBody>
@@ -10983,7 +10983,7 @@
                 </a:solidFill>
                 <a:latin typeface="Calibri"/>
               </a:rPr>
-              <a:t>WEEK 4  ·  DAY 1  ·  THE METRIC CLINIC, IF THE TENTATIVE FACULTY BLOCK SLIPS</a:t>
+              <a:t>WEEK 4  ·  MONDAY  ·  THE METRIC CLINIC, IF THE TENTATIVE FACULTY BLOCK SLIPS</a:t>
             </a:r>
           </a:p>
         </p:txBody>
@@ -11986,7 +11986,7 @@
                 </a:solidFill>
                 <a:latin typeface="Calibri"/>
               </a:rPr>
-              <a:t>WEEK 4  ·  DAY 1  ·  THE METRIC CLINIC, IF THE TENTATIVE FACULTY BLOCK SLIPS</a:t>
+              <a:t>WEEK 4  ·  MONDAY  ·  THE METRIC CLINIC, IF THE TENTATIVE FACULTY BLOCK SLIPS</a:t>
             </a:r>
           </a:p>
         </p:txBody>
@@ -13111,7 +13111,7 @@
                 </a:solidFill>
                 <a:latin typeface="Georgia"/>
               </a:rPr>
-              <a:t>07</a:t>
+              <a:t>14</a:t>
             </a:r>
           </a:p>
         </p:txBody>
@@ -13642,7 +13642,7 @@
                 </a:solidFill>
                 <a:latin typeface="Calibri"/>
               </a:rPr>
-              <a:t>WEEK 4  ·  DAY 1  ·  THE METRIC CLINIC, IF THE TENTATIVE FACULTY BLOCK SLIPS</a:t>
+              <a:t>WEEK 4  ·  MONDAY  ·  THE METRIC CLINIC, IF THE TENTATIVE FACULTY BLOCK SLIPS</a:t>
             </a:r>
           </a:p>
         </p:txBody>
@@ -14954,7 +14954,7 @@
                 </a:solidFill>
                 <a:latin typeface="Calibri"/>
               </a:rPr>
-              <a:t>WEEK 4  ·  DAY 1  ·  THE METRIC CLINIC, IF THE TENTATIVE FACULTY BLOCK SLIPS</a:t>
+              <a:t>WEEK 4  ·  MONDAY  ·  THE METRIC CLINIC, IF THE TENTATIVE FACULTY BLOCK SLIPS</a:t>
             </a:r>
           </a:p>
         </p:txBody>
@@ -16008,7 +16008,7 @@
                 </a:solidFill>
                 <a:latin typeface="Georgia"/>
               </a:rPr>
-              <a:t>08</a:t>
+              <a:t>15</a:t>
             </a:r>
           </a:p>
         </p:txBody>
@@ -16539,7 +16539,7 @@
                 </a:solidFill>
                 <a:latin typeface="Calibri"/>
               </a:rPr>
-              <a:t>WEEK 4  ·  DAY 1  ·  THE METRIC CLINIC, IF THE TENTATIVE FACULTY BLOCK SLIPS</a:t>
+              <a:t>WEEK 4  ·  MONDAY  ·  THE METRIC CLINIC, IF THE TENTATIVE FACULTY BLOCK SLIPS</a:t>
             </a:r>
           </a:p>
         </p:txBody>

--- a/content/W04/D1/slides/C2_W04_D01_fallback_STUDENT.pptx
+++ b/content/W04/D1/slides/C2_W04_D01_fallback_STUDENT.pptx
@@ -600,7 +600,7 @@
           <a:lstStyle/>
           <a:p>
             <a:r>
-              <a:t>LIVE, 4 minutes. A dashboard of only lagging numbers lets a drift run for weeks before anyone sees</a:t>
+              <a:t>LIVE, 6 minutes. A dashboard of only lagging numbers lets a drift run for weeks before anyone sees</a:t>
             </a:r>
           </a:p>
           <a:p>
@@ -685,7 +685,7 @@
           </a:p>
           <a:p>
             <a:r>
-              <a:t>gaming it catches. A guardrail that is another growth count gets the question: what would it catch?</a:t>
+              <a:t>gaming it catches. A growth target offered as a guardrail gets the question: what would it catch?</a:t>
             </a:r>
           </a:p>
           <a:p>
@@ -760,7 +760,7 @@
           <a:lstStyle/>
           <a:p>
             <a:r>
-              <a:t>LIVE, 15 minutes: the second transcript read in pairs (10), scored (5). The transcript is the [D]</a:t>
+              <a:t>LIVE, 15 minutes: the second transcript read in pairs (8), scored (5), the close (2). The transcript is the [D]</a:t>
             </a:r>
           </a:p>
           <a:p>
@@ -840,7 +840,12 @@
           <a:lstStyle/>
           <a:p>
             <a:r>
-              <a:t>LIVE, 8 minutes. Score both on the scorecard (trainer/C2_W04_D01_interview_scorecards_TRAINER.md).</a:t>
+              <a:t>LIVE, 13 minutes: read in pairs (8), then score both on the scorecard (5)</a:t>
+            </a:r>
+          </a:p>
+          <a:p>
+            <a:r>
+              <a:t>(trainer/C2_W04_D01_interview_scorecards_TRAINER.md).</a:t>
             </a:r>
           </a:p>
           <a:p>
@@ -1335,7 +1340,17 @@
           </a:p>
           <a:p>
             <a:r>
-              <a:t>minutes to write.</a:t>
+              <a:t>minutes to write. The finance and marketing readers argue different numbers here than on their round 1</a:t>
+            </a:r>
+          </a:p>
+          <a:p>
+            <a:r>
+              <a:t>cards, on purpose: each defends a number it did not choose, so the room hears each attack from the</a:t>
+            </a:r>
+          </a:p>
+          <a:p>
+            <a:r>
+              <a:t>other side.</a:t>
             </a:r>
           </a:p>
           <a:p>
@@ -1570,7 +1585,17 @@
           <a:lstStyle/>
           <a:p>
             <a:r>
-              <a:t>LIVE, 8 minutes. Letters first, then each group defends two of its calls aloud.</a:t>
+              <a:t>LIVE, 12 minutes. The eight numbers and the options are the handout's Q1, in its order</a:t>
+            </a:r>
+          </a:p>
+          <a:p>
+            <a:r>
+              <a:t>(exercises/unguided/C2_W04_D01_lead_lag_STUDENT.md); its Q2 is the defence. Letters first, then</a:t>
+            </a:r>
+          </a:p>
+          <a:p>
+            <a:r>
+              <a:t>each group defends two of its calls aloud.</a:t>
             </a:r>
           </a:p>
           <a:p>
@@ -5372,7 +5397,7 @@
       </p:sp>
       <p:pic>
         <p:nvPicPr>
-          <p:cNvPr id="9" name="mermaid diagram" descr="fe10c663b620d6a0.png"/>
+          <p:cNvPr id="9" name="mermaid diagram" descr="caebcc638b2de61c.png"/>
           <p:cNvPicPr>
             <a:picLocks noChangeAspect="1"/>
           </p:cNvPicPr>
@@ -5386,8 +5411,8 @@
         </p:blipFill>
         <p:spPr>
           <a:xfrm>
-            <a:off x="1623860" y="1956816"/>
-            <a:ext cx="8943975" cy="1871662"/>
+            <a:off x="1352397" y="1956816"/>
+            <a:ext cx="9486900" cy="1871662"/>
           </a:xfrm>
           <a:prstGeom prst="rect">
             <a:avLst/>
@@ -6271,7 +6296,7 @@
                           </a:solidFill>
                           <a:latin typeface="Calibri"/>
                         </a:rPr>
-                        <a:t>Share of offers accepted, at or above a floor</a:t>
+                        <a:t>Share of offers accepted, at or above an acceptance floor</a:t>
                       </a:r>
                     </a:p>
                   </a:txBody>
@@ -6317,7 +6342,7 @@
                           </a:solidFill>
                           <a:latin typeface="Calibri"/>
                         </a:rPr>
-                        <a:t>Drivers sit online in zones with no riders</a:t>
+                        <a:t>Drivers sit online in zones with few riders</a:t>
                       </a:r>
                     </a:p>
                   </a:txBody>
@@ -16717,7 +16742,7 @@
                           </a:solidFill>
                           <a:latin typeface="Calibri"/>
                         </a:rPr>
-                        <a:t>Enrolled drivers online in the first peak hour</a:t>
+                        <a:t>Rider rating at month end</a:t>
                       </a:r>
                     </a:p>
                   </a:txBody>
@@ -16763,7 +16788,7 @@
                           </a:solidFill>
                           <a:latin typeface="Calibri"/>
                         </a:rPr>
-                        <a:t>Rider requests per online hour, by zone</a:t>
+                        <a:t>Share of offers accepted this week</a:t>
                       </a:r>
                     </a:p>
                   </a:txBody>
@@ -16809,7 +16834,7 @@
                           </a:solidFill>
                           <a:latin typeface="Calibri"/>
                         </a:rPr>
-                        <a:t>Share of offers accepted this week</a:t>
+                        <a:t>Gross bookings for the quarter</a:t>
                       </a:r>
                     </a:p>
                   </a:txBody>
@@ -16855,7 +16880,7 @@
                           </a:solidFill>
                           <a:latin typeface="Calibri"/>
                         </a:rPr>
-                        <a:t>New driver sign-ups this week</a:t>
+                        <a:t>Enrolled drivers online in the first peak hour</a:t>
                       </a:r>
                     </a:p>
                   </a:txBody>
@@ -16947,7 +16972,7 @@
                           </a:solidFill>
                           <a:latin typeface="Calibri"/>
                         </a:rPr>
-                        <a:t>Rider rating at month end</a:t>
+                        <a:t>New driver sign-ups this week</a:t>
                       </a:r>
                     </a:p>
                   </a:txBody>
@@ -16993,7 +17018,7 @@
                           </a:solidFill>
                           <a:latin typeface="Calibri"/>
                         </a:rPr>
-                        <a:t>Drivers who left the platform next quarter</a:t>
+                        <a:t>Drivers who left the platform the next quarter</a:t>
                       </a:r>
                     </a:p>
                   </a:txBody>
@@ -17039,7 +17064,7 @@
                           </a:solidFill>
                           <a:latin typeface="Calibri"/>
                         </a:rPr>
-                        <a:t>Gross bookings for the quarter</a:t>
+                        <a:t>Rider requests per online hour, by zone</a:t>
                       </a:r>
                     </a:p>
                   </a:txBody>
@@ -17088,7 +17113,7 @@
                 </a:solidFill>
                 <a:latin typeface="Calibri"/>
               </a:rPr>
-              <a:t>a) 1, 2, 3 and 4 lead; 5, 6, 7 and 8 lag</a:t>
+              <a:t>a) 2, 4, 6 and 8 lead; the other four lag</a:t>
             </a:r>
           </a:p>
           <a:p>
@@ -17104,7 +17129,7 @@
                 </a:solidFill>
                 <a:latin typeface="Calibri"/>
               </a:rPr>
-              <a:t>b) 1, 3, 5 and 7 lead; 2, 4, 6 and 8 lag</a:t>
+              <a:t>b) 1, 2, 4 and 8 lead; the other four lag</a:t>
             </a:r>
           </a:p>
           <a:p>
@@ -17120,7 +17145,7 @@
                 </a:solidFill>
                 <a:latin typeface="Calibri"/>
               </a:rPr>
-              <a:t>c) 1 and 2 lead; the other six lag</a:t>
+              <a:t>c) 2, 4 and 8 lead; the other five lag</a:t>
             </a:r>
           </a:p>
           <a:p>
@@ -17136,7 +17161,7 @@
                 </a:solidFill>
                 <a:latin typeface="Calibri"/>
               </a:rPr>
-              <a:t>d) 3, 5 and 8 lead; the other five lag</a:t>
+              <a:t>d) 2, 3, 5 and 6 lead; the other four lag</a:t>
             </a:r>
           </a:p>
         </p:txBody>

--- a/content/W04/D1/slides/C2_W04_D01_fallback_STUDENT.pptx
+++ b/content/W04/D1/slides/C2_W04_D01_fallback_STUDENT.pptx
@@ -5397,7 +5397,7 @@
       </p:sp>
       <p:pic>
         <p:nvPicPr>
-          <p:cNvPr id="9" name="mermaid diagram" descr="caebcc638b2de61c.png"/>
+          <p:cNvPr id="9" name="mermaid diagram" descr="c2d06599c11bc324.png"/>
           <p:cNvPicPr>
             <a:picLocks noChangeAspect="1"/>
           </p:cNvPicPr>
@@ -16742,7 +16742,7 @@
                           </a:solidFill>
                           <a:latin typeface="Calibri"/>
                         </a:rPr>
-                        <a:t>Rider rating at month end</a:t>
+                        <a:t>Rider rating of this week's trips</a:t>
                       </a:r>
                     </a:p>
                   </a:txBody>
@@ -16834,7 +16834,7 @@
                           </a:solidFill>
                           <a:latin typeface="Calibri"/>
                         </a:rPr>
-                        <a:t>Gross bookings for the quarter</a:t>
+                        <a:t>Gross bookings this week</a:t>
                       </a:r>
                     </a:p>
                   </a:txBody>
@@ -16880,7 +16880,7 @@
                           </a:solidFill>
                           <a:latin typeface="Calibri"/>
                         </a:rPr>
-                        <a:t>Enrolled drivers online in the first peak hour</a:t>
+                        <a:t>Enrolled drivers online in this week's first peak hours</a:t>
                       </a:r>
                     </a:p>
                   </a:txBody>
@@ -16926,7 +16926,7 @@
                           </a:solidFill>
                           <a:latin typeface="Calibri"/>
                         </a:rPr>
-                        <a:t>Top-up paid for the month</a:t>
+                        <a:t>Top-up paid for this week</a:t>
                       </a:r>
                     </a:p>
                   </a:txBody>
@@ -17018,7 +17018,7 @@
                           </a:solidFill>
                           <a:latin typeface="Calibri"/>
                         </a:rPr>
-                        <a:t>Drivers who left the platform the next quarter</a:t>
+                        <a:t>Rider complaints filed about this week's trips</a:t>
                       </a:r>
                     </a:p>
                   </a:txBody>
@@ -17064,7 +17064,7 @@
                           </a:solidFill>
                           <a:latin typeface="Calibri"/>
                         </a:rPr>
-                        <a:t>Rider requests per online hour, by zone</a:t>
+                        <a:t>Rider requests per online hour this week, by zone</a:t>
                       </a:r>
                     </a:p>
                   </a:txBody>
